--- a/assets/pptx/catalog-239.pptx
+++ b/assets/pptx/catalog-239.pptx
@@ -3468,7 +3468,7 @@
                 <a:ea typeface="Ebrima"/>
                 <a:cs typeface="Ebrima"/>
               </a:rPr>
-              <a:t>እያልኮኝ ባርኮቴን ስቆጥር ድል ይሆንልኛል (2x)</a:t>
+              <a:t>እያልኮኝ ባርኮቴን ስቆጥር ድል ይሆንልኛል 2x</a:t>
             </a:r>
           </a:p>
         </p:txBody>
@@ -3535,7 +3535,7 @@
                 <a:ea typeface="Ebrima"/>
                 <a:cs typeface="Ebrima"/>
               </a:rPr>
-              <a:t>አቤኔዘር እግዚአብሔር ረዳኝ (3x)</a:t>
+              <a:t>አቤኔዘር እግዚአብሔር ረዳኝ 3x</a:t>
             </a:r>
           </a:p>
           <a:p>
@@ -3589,7 +3589,7 @@
                 <a:ea typeface="Ebrima"/>
                 <a:cs typeface="Ebrima"/>
               </a:rPr>
-              <a:t>ለነገውም እርሱ አለኝ (2x)</a:t>
+              <a:t>ለነገውም እርሱ አለኝ 2x</a:t>
             </a:r>
           </a:p>
         </p:txBody>
@@ -3656,7 +3656,7 @@
                 <a:ea typeface="Ebrima"/>
                 <a:cs typeface="Ebrima"/>
               </a:rPr>
-              <a:t>አቤኔዘር እግዚአብሔር ረዳኝ (3x)</a:t>
+              <a:t>አቤኔዘር እግዚአብሔር ረዳኝ 3x</a:t>
             </a:r>
           </a:p>
           <a:p>
@@ -3710,7 +3710,7 @@
                 <a:ea typeface="Ebrima"/>
                 <a:cs typeface="Ebrima"/>
               </a:rPr>
-              <a:t>ለነገውም እርሱ አለኝ (2x)</a:t>
+              <a:t>ለነገውም እርሱ አለኝ 2x</a:t>
             </a:r>
           </a:p>
         </p:txBody>
@@ -3777,7 +3777,7 @@
                 <a:ea typeface="Ebrima"/>
                 <a:cs typeface="Ebrima"/>
               </a:rPr>
-              <a:t>ባርኮቴን ስቆጥረው ዘምር ዘምር ይለኛል (2x)</a:t>
+              <a:t>ባርኮቴን ስቆጥረው ዘምር ዘምር ይለኛል 2x</a:t>
             </a:r>
           </a:p>
           <a:p>
@@ -3831,7 +3831,7 @@
                 <a:ea typeface="Ebrima"/>
                 <a:cs typeface="Ebrima"/>
               </a:rPr>
-              <a:t>ከሸለቆም ይወጣል (2x)</a:t>
+              <a:t>ከሸለቆም ይወጣል 2x</a:t>
             </a:r>
           </a:p>
         </p:txBody>
@@ -3898,7 +3898,7 @@
                 <a:ea typeface="Ebrima"/>
                 <a:cs typeface="Ebrima"/>
               </a:rPr>
-              <a:t>ባርኮቴን ስቆጥረው ዘምር ዘምር ይለኛል (2x)</a:t>
+              <a:t>ባርኮቴን ስቆጥረው ዘምር ዘምር ይለኛል 2x</a:t>
             </a:r>
           </a:p>
           <a:p>
@@ -3952,7 +3952,7 @@
                 <a:ea typeface="Ebrima"/>
                 <a:cs typeface="Ebrima"/>
               </a:rPr>
-              <a:t>ከሸለቆም ይወጣል (2x)</a:t>
+              <a:t>ከሸለቆም ይወጣል 2x</a:t>
             </a:r>
           </a:p>
         </p:txBody>
@@ -4019,7 +4019,7 @@
                 <a:ea typeface="Ebrima"/>
                 <a:cs typeface="Ebrima"/>
               </a:rPr>
-              <a:t>አቤኔዘር እግዚአብሔር ረዳኝ (3x)</a:t>
+              <a:t>አቤኔዘር እግዚአብሔር ረዳኝ 3x</a:t>
             </a:r>
           </a:p>
           <a:p>
@@ -4073,7 +4073,7 @@
                 <a:ea typeface="Ebrima"/>
                 <a:cs typeface="Ebrima"/>
               </a:rPr>
-              <a:t>ለነገውም እርሱ አለኝ (2x)</a:t>
+              <a:t>ለነገውም እርሱ አለኝ 2x</a:t>
             </a:r>
           </a:p>
         </p:txBody>
@@ -4140,7 +4140,7 @@
                 <a:ea typeface="Ebrima"/>
                 <a:cs typeface="Ebrima"/>
               </a:rPr>
-              <a:t>ባርኮቴን ስቆጥረው ዘምር ዘምር ይለኛል (2x)</a:t>
+              <a:t>ባርኮቴን ስቆጥረው ዘምር ዘምር ይለኛል 2x</a:t>
             </a:r>
           </a:p>
           <a:p>
@@ -4194,7 +4194,7 @@
                 <a:ea typeface="Ebrima"/>
                 <a:cs typeface="Ebrima"/>
               </a:rPr>
-              <a:t>ከሸለቆም ይወጣል (2x)</a:t>
+              <a:t>ከሸለቆም ይወጣል 2x</a:t>
             </a:r>
           </a:p>
         </p:txBody>
@@ -4261,7 +4261,7 @@
                 <a:ea typeface="Ebrima"/>
                 <a:cs typeface="Ebrima"/>
               </a:rPr>
-              <a:t>ባርኮቴን ስቆጥረው ዘምር ዘምር ይለኛል (2x)</a:t>
+              <a:t>ባርኮቴን ስቆጥረው ዘምር ዘምር ይለኛል 2x</a:t>
             </a:r>
           </a:p>
           <a:p>
@@ -4315,7 +4315,7 @@
                 <a:ea typeface="Ebrima"/>
                 <a:cs typeface="Ebrima"/>
               </a:rPr>
-              <a:t>ከሸለቆም ይወጣል (2x)</a:t>
+              <a:t>ከሸለቆም ይወጣል 2x</a:t>
             </a:r>
           </a:p>
         </p:txBody>
@@ -4454,7 +4454,7 @@
                 <a:ea typeface="Ebrima"/>
                 <a:cs typeface="Ebrima"/>
               </a:rPr>
-              <a:t>እያልኮኝ ባርኮቴን ስቆጥር ድል ይሆንልኛል (2x)</a:t>
+              <a:t>እያልኮኝ ባርኮቴን ስቆጥር ድል ይሆንልኛል 2x</a:t>
             </a:r>
           </a:p>
         </p:txBody>
@@ -4521,7 +4521,7 @@
                 <a:ea typeface="Ebrima"/>
                 <a:cs typeface="Ebrima"/>
               </a:rPr>
-              <a:t>አቤኔዘር እግዚአብሔር ረዳኝ (3x)</a:t>
+              <a:t>አቤኔዘር እግዚአብሔር ረዳኝ 3x</a:t>
             </a:r>
           </a:p>
           <a:p>
@@ -4575,7 +4575,7 @@
                 <a:ea typeface="Ebrima"/>
                 <a:cs typeface="Ebrima"/>
               </a:rPr>
-              <a:t>ለነገውም እርሱ አለኝ (2x)</a:t>
+              <a:t>ለነገውም እርሱ አለኝ 2x</a:t>
             </a:r>
           </a:p>
         </p:txBody>
@@ -4642,7 +4642,7 @@
                 <a:ea typeface="Ebrima"/>
                 <a:cs typeface="Ebrima"/>
               </a:rPr>
-              <a:t>ባርኮቴን ስቆጥረው ዘምር ዘምር ይለኛል (2x)</a:t>
+              <a:t>ባርኮቴን ስቆጥረው ዘምር ዘምር ይለኛል 2x</a:t>
             </a:r>
           </a:p>
           <a:p>
@@ -4696,7 +4696,7 @@
                 <a:ea typeface="Ebrima"/>
                 <a:cs typeface="Ebrima"/>
               </a:rPr>
-              <a:t>ከሸለቆም ይወጣል (2x)</a:t>
+              <a:t>ከሸለቆም ይወጣል 2x</a:t>
             </a:r>
           </a:p>
         </p:txBody>
@@ -4763,7 +4763,7 @@
                 <a:ea typeface="Ebrima"/>
                 <a:cs typeface="Ebrima"/>
               </a:rPr>
-              <a:t>ባርኮቴን ስቆጥረው ዘምር ዘምር ይለኛል (2x)</a:t>
+              <a:t>ባርኮቴን ስቆጥረው ዘምር ዘምር ይለኛል 2x</a:t>
             </a:r>
           </a:p>
           <a:p>
@@ -4817,7 +4817,7 @@
                 <a:ea typeface="Ebrima"/>
                 <a:cs typeface="Ebrima"/>
               </a:rPr>
-              <a:t>ከሸለቆም ይወጣል (2x)</a:t>
+              <a:t>ከሸለቆም ይወጣል 2x</a:t>
             </a:r>
           </a:p>
         </p:txBody>
@@ -4884,7 +4884,7 @@
                 <a:ea typeface="Ebrima"/>
                 <a:cs typeface="Ebrima"/>
               </a:rPr>
-              <a:t>አቤኔዘር እግዚአብሔር ረዳኝ (3x)</a:t>
+              <a:t>አቤኔዘር እግዚአብሔር ረዳኝ 3x</a:t>
             </a:r>
           </a:p>
           <a:p>
@@ -4938,7 +4938,7 @@
                 <a:ea typeface="Ebrima"/>
                 <a:cs typeface="Ebrima"/>
               </a:rPr>
-              <a:t>ለነገውም እርሱ አለኝ (2x)</a:t>
+              <a:t>ለነገውም እርሱ አለኝ 2x</a:t>
             </a:r>
           </a:p>
         </p:txBody>
@@ -5005,7 +5005,7 @@
                 <a:ea typeface="Ebrima"/>
                 <a:cs typeface="Ebrima"/>
               </a:rPr>
-              <a:t>ባርኮቴን ስቆጥረው ዘምር ዘምር ይለኛል (2x)</a:t>
+              <a:t>ባርኮቴን ስቆጥረው ዘምር ዘምር ይለኛል 2x</a:t>
             </a:r>
           </a:p>
           <a:p>
@@ -5059,7 +5059,7 @@
                 <a:ea typeface="Ebrima"/>
                 <a:cs typeface="Ebrima"/>
               </a:rPr>
-              <a:t>ከሸለቆም ይወጣል (2x)</a:t>
+              <a:t>ከሸለቆም ይወጣል 2x</a:t>
             </a:r>
           </a:p>
         </p:txBody>
@@ -5126,7 +5126,7 @@
                 <a:ea typeface="Ebrima"/>
                 <a:cs typeface="Ebrima"/>
               </a:rPr>
-              <a:t>ባርኮቴን ስቆጥረው ዘምር ዘምር ይለኛል (2x)</a:t>
+              <a:t>ባርኮቴን ስቆጥረው ዘምር ዘምር ይለኛል 2x</a:t>
             </a:r>
           </a:p>
           <a:p>
@@ -5180,7 +5180,7 @@
                 <a:ea typeface="Ebrima"/>
                 <a:cs typeface="Ebrima"/>
               </a:rPr>
-              <a:t>ከሸለቆም ይወጣል (2x)</a:t>
+              <a:t>ከሸለቆም ይወጣል 2x</a:t>
             </a:r>
           </a:p>
         </p:txBody>
